--- a/Fase 1/Evidencias Grupales/Presentación Proyecto.pptx
+++ b/Fase 1/Evidencias Grupales/Presentación Proyecto.pptx
@@ -2993,7 +2993,7 @@
                 <a:ea typeface="Calibri" pitchFamily="34" charset="-122"/>
                 <a:cs typeface="Calibri" pitchFamily="34" charset="-120"/>
               </a:rPr>
-              <a:t>Colaborador, validador de ronda y gestor</a:t>
+              <a:t>Colaborador y validador de ronda</a:t>
             </a:r>
             <a:endParaRPr lang="en-US" sz="1000" dirty="0"/>
           </a:p>
@@ -3301,7 +3301,7 @@
                 <a:ea typeface="Calibri" pitchFamily="34" charset="-122"/>
                 <a:cs typeface="Calibri" pitchFamily="34" charset="-120"/>
               </a:rPr>
-              <a:t>Administrador de planta</a:t>
+              <a:t>Administrador de planta; registra los retiros</a:t>
             </a:r>
             <a:endParaRPr lang="en-US" sz="1000" dirty="0"/>
           </a:p>
@@ -3455,7 +3455,7 @@
                 <a:ea typeface="Calibri" pitchFamily="34" charset="-122"/>
                 <a:cs typeface="Calibri" pitchFamily="34" charset="-120"/>
               </a:rPr>
-              <a:t>Correo o Google; roles por código</a:t>
+              <a:t>Correo o Google; el administrador asigna al validador</a:t>
             </a:r>
             <a:endParaRPr lang="en-US" sz="1000" dirty="0"/>
           </a:p>
@@ -3951,7 +3951,7 @@
         </p:nvSpPr>
         <p:spPr>
           <a:xfrm>
-            <a:off x="1143000" y="868680"/>
+            <a:off x="1727200" y="868680"/>
             <a:ext cx="502920" cy="502920"/>
           </a:xfrm>
           <a:prstGeom prst="ellipse">
@@ -3984,7 +3984,7 @@
         </p:blipFill>
         <p:spPr>
           <a:xfrm>
-            <a:off x="1253642" y="979322"/>
+            <a:off x="1837842" y="979322"/>
             <a:ext cx="281635" cy="281635"/>
           </a:xfrm>
           <a:prstGeom prst="rect">
@@ -4000,7 +4000,7 @@
         </p:nvSpPr>
         <p:spPr>
           <a:xfrm>
-            <a:off x="640080" y="1389888"/>
+            <a:off x="1224280" y="1389888"/>
             <a:ext cx="1508760" cy="256032"/>
           </a:xfrm>
           <a:prstGeom prst="rect">
@@ -4039,7 +4039,7 @@
         </p:nvSpPr>
         <p:spPr>
           <a:xfrm>
-            <a:off x="1389888" y="1664208"/>
+            <a:off x="1974088" y="1664208"/>
             <a:ext cx="0" cy="301752"/>
           </a:xfrm>
           <a:prstGeom prst="line">
@@ -4063,7 +4063,7 @@
         </p:nvSpPr>
         <p:spPr>
           <a:xfrm>
-            <a:off x="685800" y="1993392"/>
+            <a:off x="1270000" y="1993392"/>
             <a:ext cx="1417320" cy="502920"/>
           </a:xfrm>
           <a:prstGeom prst="roundRect">
@@ -4090,7 +4090,7 @@
         </p:nvSpPr>
         <p:spPr>
           <a:xfrm>
-            <a:off x="685800" y="1993392"/>
+            <a:off x="1270000" y="1993392"/>
             <a:ext cx="1417320" cy="502920"/>
           </a:xfrm>
           <a:prstGeom prst="rect">
@@ -4129,7 +4129,7 @@
         </p:nvSpPr>
         <p:spPr>
           <a:xfrm>
-            <a:off x="1389888" y="2514600"/>
+            <a:off x="1974088" y="2514600"/>
             <a:ext cx="0" cy="301752"/>
           </a:xfrm>
           <a:prstGeom prst="line">
@@ -4153,7 +4153,7 @@
         </p:nvSpPr>
         <p:spPr>
           <a:xfrm>
-            <a:off x="3200400" y="868680"/>
+            <a:off x="4318000" y="868680"/>
             <a:ext cx="502920" cy="502920"/>
           </a:xfrm>
           <a:prstGeom prst="ellipse">
@@ -4186,7 +4186,7 @@
         </p:blipFill>
         <p:spPr>
           <a:xfrm>
-            <a:off x="3311042" y="979322"/>
+            <a:off x="4428642" y="979322"/>
             <a:ext cx="281635" cy="281635"/>
           </a:xfrm>
           <a:prstGeom prst="rect">
@@ -4202,7 +4202,7 @@
         </p:nvSpPr>
         <p:spPr>
           <a:xfrm>
-            <a:off x="2697480" y="1389888"/>
+            <a:off x="3815080" y="1389888"/>
             <a:ext cx="1508760" cy="256032"/>
           </a:xfrm>
           <a:prstGeom prst="rect">
@@ -4241,7 +4241,7 @@
         </p:nvSpPr>
         <p:spPr>
           <a:xfrm>
-            <a:off x="3447288" y="1664208"/>
+            <a:off x="4564888" y="1664208"/>
             <a:ext cx="0" cy="301752"/>
           </a:xfrm>
           <a:prstGeom prst="line">
@@ -4265,7 +4265,7 @@
         </p:nvSpPr>
         <p:spPr>
           <a:xfrm>
-            <a:off x="2743200" y="1993392"/>
+            <a:off x="3860800" y="1993392"/>
             <a:ext cx="1417320" cy="502920"/>
           </a:xfrm>
           <a:prstGeom prst="roundRect">
@@ -4292,7 +4292,7 @@
         </p:nvSpPr>
         <p:spPr>
           <a:xfrm>
-            <a:off x="2743200" y="1993392"/>
+            <a:off x="3860800" y="1993392"/>
             <a:ext cx="1417320" cy="502920"/>
           </a:xfrm>
           <a:prstGeom prst="rect">
@@ -4331,7 +4331,7 @@
         </p:nvSpPr>
         <p:spPr>
           <a:xfrm>
-            <a:off x="3447288" y="2514600"/>
+            <a:off x="4564888" y="2514600"/>
             <a:ext cx="0" cy="301752"/>
           </a:xfrm>
           <a:prstGeom prst="line">
@@ -4349,24 +4349,24 @@
       </p:sp>
       <p:sp>
         <p:nvSpPr>
-          <p:cNvPr id="17" name="Shape 13"/>
+          <p:cNvPr id="24" name="Shape 19"/>
           <p:cNvSpPr/>
           <p:nvPr/>
         </p:nvSpPr>
         <p:spPr>
           <a:xfrm>
-            <a:off x="5257800" y="868680"/>
+            <a:off x="6908800" y="868680"/>
             <a:ext cx="502920" cy="502920"/>
           </a:xfrm>
           <a:prstGeom prst="ellipse">
             <a:avLst/>
           </a:prstGeom>
           <a:solidFill>
-            <a:srgbClr val="7659A8"/>
+            <a:srgbClr val="3B6BB0"/>
           </a:solidFill>
           <a:ln w="12700">
             <a:solidFill>
-              <a:srgbClr val="7659A8"/>
+              <a:srgbClr val="3B6BB0"/>
             </a:solidFill>
             <a:prstDash val="solid"/>
           </a:ln>
@@ -4374,21 +4374,21 @@
       </p:sp>
       <p:pic>
         <p:nvPicPr>
-          <p:cNvPr id="18" name="Image 2" descr="preencoded.png">    </p:cNvPr>
+          <p:cNvPr id="25" name="Image 3" descr="preencoded.png">    </p:cNvPr>
           <p:cNvPicPr>
             <a:picLocks noChangeAspect="1"/>
           </p:cNvPicPr>
           <p:nvPr/>
         </p:nvPicPr>
         <p:blipFill>
-          <a:blip r:embed="rId3"/>
+          <a:blip r:embed="rId4"/>
           <a:stretch>
             <a:fillRect/>
           </a:stretch>
         </p:blipFill>
         <p:spPr>
           <a:xfrm>
-            <a:off x="5368442" y="979322"/>
+            <a:off x="7019442" y="979322"/>
             <a:ext cx="281635" cy="281635"/>
           </a:xfrm>
           <a:prstGeom prst="rect">
@@ -4398,13 +4398,13 @@
       </p:pic>
       <p:sp>
         <p:nvSpPr>
-          <p:cNvPr id="19" name="Text 14"/>
-          <p:cNvSpPr txBox="1"/>
-          <p:nvPr/>
-        </p:nvSpPr>
-        <p:spPr>
-          <a:xfrm>
-            <a:off x="4754880" y="1389888"/>
+          <p:cNvPr id="26" name="Text 20"/>
+          <p:cNvSpPr txBox="1"/>
+          <p:nvPr/>
+        </p:nvSpPr>
+        <p:spPr>
+          <a:xfrm>
+            <a:off x="6405880" y="1389888"/>
             <a:ext cx="1508760" cy="256032"/>
           </a:xfrm>
           <a:prstGeom prst="rect">
@@ -4429,7 +4429,7 @@
                 <a:ea typeface="Calibri" pitchFamily="34" charset="-122"/>
                 <a:cs typeface="Calibri" pitchFamily="34" charset="-120"/>
               </a:rPr>
-              <a:t>Gestor</a:t>
+              <a:t>Administrador</a:t>
             </a:r>
             <a:endParaRPr lang="en-US" sz="1100" dirty="0"/>
           </a:p>
@@ -4437,13 +4437,13 @@
       </p:sp>
       <p:sp>
         <p:nvSpPr>
-          <p:cNvPr id="20" name="Shape 15"/>
+          <p:cNvPr id="27" name="Shape 21"/>
           <p:cNvSpPr/>
           <p:nvPr/>
         </p:nvSpPr>
         <p:spPr>
           <a:xfrm>
-            <a:off x="5504688" y="1664208"/>
+            <a:off x="7155688" y="1664208"/>
             <a:ext cx="0" cy="301752"/>
           </a:xfrm>
           <a:prstGeom prst="line">
@@ -4461,13 +4461,13 @@
       </p:sp>
       <p:sp>
         <p:nvSpPr>
-          <p:cNvPr id="21" name="Shape 16"/>
+          <p:cNvPr id="28" name="Shape 22"/>
           <p:cNvSpPr/>
           <p:nvPr/>
         </p:nvSpPr>
         <p:spPr>
           <a:xfrm>
-            <a:off x="4800600" y="1993392"/>
+            <a:off x="6451600" y="1993392"/>
             <a:ext cx="1417320" cy="502920"/>
           </a:xfrm>
           <a:prstGeom prst="roundRect">
@@ -4480,7 +4480,7 @@
           </a:solidFill>
           <a:ln w="16510">
             <a:solidFill>
-              <a:srgbClr val="7659A8"/>
+              <a:srgbClr val="3B6BB0"/>
             </a:solidFill>
             <a:prstDash val="solid"/>
           </a:ln>
@@ -4488,13 +4488,13 @@
       </p:sp>
       <p:sp>
         <p:nvSpPr>
-          <p:cNvPr id="22" name="Text 17"/>
-          <p:cNvSpPr txBox="1"/>
-          <p:nvPr/>
-        </p:nvSpPr>
-        <p:spPr>
-          <a:xfrm>
-            <a:off x="4800600" y="1993392"/>
+          <p:cNvPr id="29" name="Text 23"/>
+          <p:cNvSpPr txBox="1"/>
+          <p:nvPr/>
+        </p:nvSpPr>
+        <p:spPr>
+          <a:xfrm>
+            <a:off x="6451600" y="1993392"/>
             <a:ext cx="1417320" cy="502920"/>
           </a:xfrm>
           <a:prstGeom prst="rect">
@@ -4519,7 +4519,7 @@
                 <a:ea typeface="Calibri" pitchFamily="34" charset="-122"/>
                 <a:cs typeface="Calibri" pitchFamily="34" charset="-120"/>
               </a:rPr>
-              <a:t>Retiros</a:t>
+              <a:t>Panel web y retiros</a:t>
             </a:r>
             <a:endParaRPr lang="en-US" sz="1100" dirty="0"/>
           </a:p>
@@ -4527,13 +4527,13 @@
       </p:sp>
       <p:sp>
         <p:nvSpPr>
-          <p:cNvPr id="23" name="Shape 18"/>
+          <p:cNvPr id="30" name="Shape 24"/>
           <p:cNvSpPr/>
           <p:nvPr/>
         </p:nvSpPr>
         <p:spPr>
           <a:xfrm>
-            <a:off x="5504688" y="2514600"/>
+            <a:off x="7155688" y="2514600"/>
             <a:ext cx="0" cy="301752"/>
           </a:xfrm>
           <a:prstGeom prst="line">
@@ -4551,208 +4551,6 @@
       </p:sp>
       <p:sp>
         <p:nvSpPr>
-          <p:cNvPr id="24" name="Shape 19"/>
-          <p:cNvSpPr/>
-          <p:nvPr/>
-        </p:nvSpPr>
-        <p:spPr>
-          <a:xfrm>
-            <a:off x="7315200" y="868680"/>
-            <a:ext cx="502920" cy="502920"/>
-          </a:xfrm>
-          <a:prstGeom prst="ellipse">
-            <a:avLst/>
-          </a:prstGeom>
-          <a:solidFill>
-            <a:srgbClr val="3B6BB0"/>
-          </a:solidFill>
-          <a:ln w="12700">
-            <a:solidFill>
-              <a:srgbClr val="3B6BB0"/>
-            </a:solidFill>
-            <a:prstDash val="solid"/>
-          </a:ln>
-        </p:spPr>
-      </p:sp>
-      <p:pic>
-        <p:nvPicPr>
-          <p:cNvPr id="25" name="Image 3" descr="preencoded.png">    </p:cNvPr>
-          <p:cNvPicPr>
-            <a:picLocks noChangeAspect="1"/>
-          </p:cNvPicPr>
-          <p:nvPr/>
-        </p:nvPicPr>
-        <p:blipFill>
-          <a:blip r:embed="rId4"/>
-          <a:stretch>
-            <a:fillRect/>
-          </a:stretch>
-        </p:blipFill>
-        <p:spPr>
-          <a:xfrm>
-            <a:off x="7425842" y="979322"/>
-            <a:ext cx="281635" cy="281635"/>
-          </a:xfrm>
-          <a:prstGeom prst="rect">
-            <a:avLst/>
-          </a:prstGeom>
-        </p:spPr>
-      </p:pic>
-      <p:sp>
-        <p:nvSpPr>
-          <p:cNvPr id="26" name="Text 20"/>
-          <p:cNvSpPr txBox="1"/>
-          <p:nvPr/>
-        </p:nvSpPr>
-        <p:spPr>
-          <a:xfrm>
-            <a:off x="6812280" y="1389888"/>
-            <a:ext cx="1508760" cy="256032"/>
-          </a:xfrm>
-          <a:prstGeom prst="rect">
-            <a:avLst/>
-          </a:prstGeom>
-          <a:noFill/>
-          <a:ln/>
-        </p:spPr>
-        <p:txBody>
-          <a:bodyPr wrap="square" lIns="0" tIns="0" rIns="0" bIns="0" rtlCol="0" anchor="ctr"/>
-          <a:lstStyle/>
-          <a:p>
-            <a:pPr algn="ctr" indent="0" marL="0">
-              <a:buNone/>
-            </a:pPr>
-            <a:r>
-              <a:rPr lang="en-US" sz="1100" b="1" dirty="0">
-                <a:solidFill>
-                  <a:srgbClr val="1D2521"/>
-                </a:solidFill>
-                <a:latin typeface="Calibri" pitchFamily="34" charset="0"/>
-                <a:ea typeface="Calibri" pitchFamily="34" charset="-122"/>
-                <a:cs typeface="Calibri" pitchFamily="34" charset="-120"/>
-              </a:rPr>
-              <a:t>Administrador</a:t>
-            </a:r>
-            <a:endParaRPr lang="en-US" sz="1100" dirty="0"/>
-          </a:p>
-        </p:txBody>
-      </p:sp>
-      <p:sp>
-        <p:nvSpPr>
-          <p:cNvPr id="27" name="Shape 21"/>
-          <p:cNvSpPr/>
-          <p:nvPr/>
-        </p:nvSpPr>
-        <p:spPr>
-          <a:xfrm>
-            <a:off x="7562088" y="1664208"/>
-            <a:ext cx="0" cy="301752"/>
-          </a:xfrm>
-          <a:prstGeom prst="line">
-            <a:avLst/>
-          </a:prstGeom>
-          <a:noFill/>
-          <a:ln w="12700">
-            <a:solidFill>
-              <a:srgbClr val="555555"/>
-            </a:solidFill>
-            <a:prstDash val="solid"/>
-            <a:tailEnd type="triangle"/>
-          </a:ln>
-        </p:spPr>
-      </p:sp>
-      <p:sp>
-        <p:nvSpPr>
-          <p:cNvPr id="28" name="Shape 22"/>
-          <p:cNvSpPr/>
-          <p:nvPr/>
-        </p:nvSpPr>
-        <p:spPr>
-          <a:xfrm>
-            <a:off x="6858000" y="1993392"/>
-            <a:ext cx="1417320" cy="502920"/>
-          </a:xfrm>
-          <a:prstGeom prst="roundRect">
-            <a:avLst>
-              <a:gd name="adj" fmla="val 10909"/>
-            </a:avLst>
-          </a:prstGeom>
-          <a:solidFill>
-            <a:srgbClr val="F1F5F1"/>
-          </a:solidFill>
-          <a:ln w="16510">
-            <a:solidFill>
-              <a:srgbClr val="3B6BB0"/>
-            </a:solidFill>
-            <a:prstDash val="solid"/>
-          </a:ln>
-        </p:spPr>
-      </p:sp>
-      <p:sp>
-        <p:nvSpPr>
-          <p:cNvPr id="29" name="Text 23"/>
-          <p:cNvSpPr txBox="1"/>
-          <p:nvPr/>
-        </p:nvSpPr>
-        <p:spPr>
-          <a:xfrm>
-            <a:off x="6858000" y="1993392"/>
-            <a:ext cx="1417320" cy="502920"/>
-          </a:xfrm>
-          <a:prstGeom prst="rect">
-            <a:avLst/>
-          </a:prstGeom>
-          <a:noFill/>
-          <a:ln/>
-        </p:spPr>
-        <p:txBody>
-          <a:bodyPr wrap="square" lIns="0" tIns="0" rIns="0" bIns="0" rtlCol="0" anchor="ctr"/>
-          <a:lstStyle/>
-          <a:p>
-            <a:pPr algn="ctr" indent="0" marL="0">
-              <a:buNone/>
-            </a:pPr>
-            <a:r>
-              <a:rPr lang="en-US" sz="1100" b="1" dirty="0">
-                <a:solidFill>
-                  <a:srgbClr val="1D2521"/>
-                </a:solidFill>
-                <a:latin typeface="Calibri" pitchFamily="34" charset="0"/>
-                <a:ea typeface="Calibri" pitchFamily="34" charset="-122"/>
-                <a:cs typeface="Calibri" pitchFamily="34" charset="-120"/>
-              </a:rPr>
-              <a:t>Panel web</a:t>
-            </a:r>
-            <a:endParaRPr lang="en-US" sz="1100" dirty="0"/>
-          </a:p>
-        </p:txBody>
-      </p:sp>
-      <p:sp>
-        <p:nvSpPr>
-          <p:cNvPr id="30" name="Shape 24"/>
-          <p:cNvSpPr/>
-          <p:nvPr/>
-        </p:nvSpPr>
-        <p:spPr>
-          <a:xfrm>
-            <a:off x="7562088" y="2514600"/>
-            <a:ext cx="0" cy="301752"/>
-          </a:xfrm>
-          <a:prstGeom prst="line">
-            <a:avLst/>
-          </a:prstGeom>
-          <a:noFill/>
-          <a:ln w="12700">
-            <a:solidFill>
-              <a:srgbClr val="555555"/>
-            </a:solidFill>
-            <a:prstDash val="solid"/>
-            <a:tailEnd type="triangle"/>
-          </a:ln>
-        </p:spPr>
-      </p:sp>
-      <p:sp>
-        <p:nvSpPr>
           <p:cNvPr id="31" name="Shape 25"/>
           <p:cNvSpPr/>
           <p:nvPr/>
@@ -4781,7 +4579,7 @@
         </p:nvSpPr>
         <p:spPr>
           <a:xfrm>
-            <a:off x="1600200" y="1700784"/>
+            <a:off x="2286000" y="1700784"/>
             <a:ext cx="1737360" cy="164592"/>
           </a:xfrm>
           <a:prstGeom prst="rect">
@@ -6255,7 +6053,7 @@
                 <a:ea typeface="Calibri" pitchFamily="34" charset="-122"/>
                 <a:cs typeface="Calibri" pitchFamily="34" charset="-120"/>
               </a:rPr>
-              <a:t>(Gestor)</a:t>
+              <a:t>(Administrador)</a:t>
             </a:r>
             <a:endParaRPr lang="en-US" sz="1050" dirty="0"/>
           </a:p>
@@ -6294,7 +6092,7 @@
                 <a:ea typeface="Calibri" pitchFamily="34" charset="-122"/>
                 <a:cs typeface="Calibri" pitchFamily="34" charset="-120"/>
               </a:rPr>
-              <a:t>Registra el retiro; con peso real el dato pasa a verificado.</a:t>
+              <a:t>Registra el retiro en el panel web; con peso real pasa a verificado.</a:t>
             </a:r>
             <a:endParaRPr lang="en-US" sz="1050" dirty="0"/>
           </a:p>
@@ -6333,7 +6131,7 @@
                 <a:ea typeface="Calibri" pitchFamily="34" charset="-122"/>
                 <a:cs typeface="Calibri" pitchFamily="34" charset="-120"/>
               </a:rPr>
-              <a:t>[Estado: retirado]</a:t>
+              <a:t>[Estado: certificado]</a:t>
             </a:r>
             <a:endParaRPr lang="en-US" sz="1000" dirty="0"/>
           </a:p>
@@ -7029,7 +6827,7 @@
                 <a:ea typeface="Calibri" pitchFamily="34" charset="-122"/>
                 <a:cs typeface="Calibri" pitchFamily="34" charset="-120"/>
               </a:rPr>
-              <a:t>Peso real y gestores</a:t>
+              <a:t>Peso real en el retiro</a:t>
             </a:r>
             <a:endParaRPr lang="en-US" sz="1400" dirty="0"/>
           </a:p>
@@ -7072,7 +6870,7 @@
                 <a:ea typeface="Calibri" pitchFamily="34" charset="-122"/>
                 <a:cs typeface="Calibri" pitchFamily="34" charset="-120"/>
               </a:rPr>
-              <a:t>Balanzas o peso informado por el gestor</a:t>
+              <a:t>Balanzas o peso informado por quien retira</a:t>
             </a:r>
             <a:endParaRPr lang="en-US" sz="1100" dirty="0"/>
           </a:p>
